--- a/data-eng/decks/w6d4s3.pptx
+++ b/data-eng/decks/w6d4s3.pptx
@@ -3098,7 +3098,7 @@
       <p:grpSpPr/>
       <p:sp>
         <p:nvSpPr>
-          <p:cNvPr id="2" name="Oval 1"/>
+          <p:cNvPr id="2" name="deckgen:decor"/>
           <p:cNvSpPr/>
           <p:nvPr/>
         </p:nvSpPr>
@@ -3128,7 +3128,7 @@
       </p:sp>
       <p:sp>
         <p:nvSpPr>
-          <p:cNvPr id="3" name="Oval 2"/>
+          <p:cNvPr id="3" name="deckgen:decor"/>
           <p:cNvSpPr/>
           <p:nvPr/>
         </p:nvSpPr>
@@ -3158,7 +3158,7 @@
       </p:sp>
       <p:sp>
         <p:nvSpPr>
-          <p:cNvPr id="4" name="Oval 3"/>
+          <p:cNvPr id="4" name="deckgen:decor"/>
           <p:cNvSpPr/>
           <p:nvPr/>
         </p:nvSpPr>
@@ -3188,7 +3188,7 @@
       </p:sp>
       <p:sp>
         <p:nvSpPr>
-          <p:cNvPr id="5" name="Rectangle 4"/>
+          <p:cNvPr id="5" name="deckgen:decor"/>
           <p:cNvSpPr/>
           <p:nvPr/>
         </p:nvSpPr>
@@ -3218,7 +3218,7 @@
       </p:sp>
       <p:sp>
         <p:nvSpPr>
-          <p:cNvPr id="6" name="Oval 5"/>
+          <p:cNvPr id="6" name="deckgen:decor"/>
           <p:cNvSpPr/>
           <p:nvPr/>
         </p:nvSpPr>
@@ -3248,7 +3248,7 @@
       </p:sp>
       <p:sp>
         <p:nvSpPr>
-          <p:cNvPr id="7" name="Oval 6"/>
+          <p:cNvPr id="7" name="deckgen:decor"/>
           <p:cNvSpPr/>
           <p:nvPr/>
         </p:nvSpPr>
@@ -3278,7 +3278,7 @@
       </p:sp>
       <p:sp>
         <p:nvSpPr>
-          <p:cNvPr id="8" name="Oval 7"/>
+          <p:cNvPr id="8" name="deckgen:decor"/>
           <p:cNvSpPr/>
           <p:nvPr/>
         </p:nvSpPr>
@@ -3308,7 +3308,7 @@
       </p:sp>
       <p:sp>
         <p:nvSpPr>
-          <p:cNvPr id="9" name="Oval 8"/>
+          <p:cNvPr id="9" name="deckgen:decor"/>
           <p:cNvSpPr/>
           <p:nvPr/>
         </p:nvSpPr>
@@ -3338,7 +3338,7 @@
       </p:sp>
       <p:sp>
         <p:nvSpPr>
-          <p:cNvPr id="10" name="Rectangle 9"/>
+          <p:cNvPr id="10" name="deckgen:decor"/>
           <p:cNvSpPr/>
           <p:nvPr/>
         </p:nvSpPr>
@@ -3598,7 +3598,7 @@
       <p:grpSpPr/>
       <p:sp>
         <p:nvSpPr>
-          <p:cNvPr id="2" name="Oval 1"/>
+          <p:cNvPr id="2" name="deckgen:decor"/>
           <p:cNvSpPr/>
           <p:nvPr/>
         </p:nvSpPr>
@@ -3628,7 +3628,7 @@
       </p:sp>
       <p:sp>
         <p:nvSpPr>
-          <p:cNvPr id="3" name="Oval 2"/>
+          <p:cNvPr id="3" name="deckgen:decor"/>
           <p:cNvSpPr/>
           <p:nvPr/>
         </p:nvSpPr>
@@ -3658,7 +3658,7 @@
       </p:sp>
       <p:sp>
         <p:nvSpPr>
-          <p:cNvPr id="4" name="Oval 3"/>
+          <p:cNvPr id="4" name="deckgen:decor"/>
           <p:cNvSpPr/>
           <p:nvPr/>
         </p:nvSpPr>
@@ -4589,7 +4589,7 @@
       <p:grpSpPr/>
       <p:sp>
         <p:nvSpPr>
-          <p:cNvPr id="2" name="Oval 1"/>
+          <p:cNvPr id="2" name="deckgen:decor"/>
           <p:cNvSpPr/>
           <p:nvPr/>
         </p:nvSpPr>
@@ -4619,7 +4619,7 @@
       </p:sp>
       <p:sp>
         <p:nvSpPr>
-          <p:cNvPr id="3" name="Oval 2"/>
+          <p:cNvPr id="3" name="deckgen:decor"/>
           <p:cNvSpPr/>
           <p:nvPr/>
         </p:nvSpPr>
@@ -4649,7 +4649,7 @@
       </p:sp>
       <p:sp>
         <p:nvSpPr>
-          <p:cNvPr id="4" name="Oval 3"/>
+          <p:cNvPr id="4" name="deckgen:decor"/>
           <p:cNvSpPr/>
           <p:nvPr/>
         </p:nvSpPr>
@@ -6304,7 +6304,7 @@
       <p:grpSpPr/>
       <p:sp>
         <p:nvSpPr>
-          <p:cNvPr id="2" name="Oval 1"/>
+          <p:cNvPr id="2" name="deckgen:decor"/>
           <p:cNvSpPr/>
           <p:nvPr/>
         </p:nvSpPr>
@@ -6334,7 +6334,7 @@
       </p:sp>
       <p:sp>
         <p:nvSpPr>
-          <p:cNvPr id="3" name="Oval 2"/>
+          <p:cNvPr id="3" name="deckgen:decor"/>
           <p:cNvSpPr/>
           <p:nvPr/>
         </p:nvSpPr>
@@ -6364,7 +6364,7 @@
       </p:sp>
       <p:sp>
         <p:nvSpPr>
-          <p:cNvPr id="4" name="Oval 3"/>
+          <p:cNvPr id="4" name="deckgen:decor"/>
           <p:cNvSpPr/>
           <p:nvPr/>
         </p:nvSpPr>
@@ -7804,7 +7804,7 @@
       <p:grpSpPr/>
       <p:sp>
         <p:nvSpPr>
-          <p:cNvPr id="2" name="Oval 1"/>
+          <p:cNvPr id="2" name="deckgen:decor"/>
           <p:cNvSpPr/>
           <p:nvPr/>
         </p:nvSpPr>
@@ -7834,7 +7834,7 @@
       </p:sp>
       <p:sp>
         <p:nvSpPr>
-          <p:cNvPr id="3" name="Oval 2"/>
+          <p:cNvPr id="3" name="deckgen:decor"/>
           <p:cNvSpPr/>
           <p:nvPr/>
         </p:nvSpPr>
@@ -7864,7 +7864,7 @@
       </p:sp>
       <p:sp>
         <p:nvSpPr>
-          <p:cNvPr id="4" name="Oval 3"/>
+          <p:cNvPr id="4" name="deckgen:decor"/>
           <p:cNvSpPr/>
           <p:nvPr/>
         </p:nvSpPr>
@@ -9506,7 +9506,7 @@
       <p:grpSpPr/>
       <p:sp>
         <p:nvSpPr>
-          <p:cNvPr id="2" name="Oval 1"/>
+          <p:cNvPr id="2" name="deckgen:decor"/>
           <p:cNvSpPr/>
           <p:nvPr/>
         </p:nvSpPr>
@@ -9536,7 +9536,7 @@
       </p:sp>
       <p:sp>
         <p:nvSpPr>
-          <p:cNvPr id="3" name="Oval 2"/>
+          <p:cNvPr id="3" name="deckgen:decor"/>
           <p:cNvSpPr/>
           <p:nvPr/>
         </p:nvSpPr>
@@ -9566,7 +9566,7 @@
       </p:sp>
       <p:sp>
         <p:nvSpPr>
-          <p:cNvPr id="4" name="Oval 3"/>
+          <p:cNvPr id="4" name="deckgen:decor"/>
           <p:cNvSpPr/>
           <p:nvPr/>
         </p:nvSpPr>
@@ -10626,7 +10626,7 @@
       <p:grpSpPr/>
       <p:sp>
         <p:nvSpPr>
-          <p:cNvPr id="2" name="Oval 1"/>
+          <p:cNvPr id="2" name="deckgen:decor"/>
           <p:cNvSpPr/>
           <p:nvPr/>
         </p:nvSpPr>
@@ -10656,7 +10656,7 @@
       </p:sp>
       <p:sp>
         <p:nvSpPr>
-          <p:cNvPr id="3" name="Oval 2"/>
+          <p:cNvPr id="3" name="deckgen:decor"/>
           <p:cNvSpPr/>
           <p:nvPr/>
         </p:nvSpPr>
@@ -10686,7 +10686,7 @@
       </p:sp>
       <p:sp>
         <p:nvSpPr>
-          <p:cNvPr id="4" name="Oval 3"/>
+          <p:cNvPr id="4" name="deckgen:decor"/>
           <p:cNvSpPr/>
           <p:nvPr/>
         </p:nvSpPr>
@@ -11341,7 +11341,7 @@
                 <a:ea typeface="Pretendard"/>
                 <a:cs typeface="Pretendard"/>
               </a:rPr>
-              <a:t>GetOffsetShell --topic shop.shop.orders</a:t>
+              <a:t>kafka-get-offsets.sh --topic shop.shop.orders</a:t>
             </a:r>
           </a:p>
         </p:txBody>
@@ -11653,7 +11653,7 @@
       <p:grpSpPr/>
       <p:sp>
         <p:nvSpPr>
-          <p:cNvPr id="2" name="Oval 1"/>
+          <p:cNvPr id="2" name="deckgen:decor"/>
           <p:cNvSpPr/>
           <p:nvPr/>
         </p:nvSpPr>
@@ -11683,7 +11683,7 @@
       </p:sp>
       <p:sp>
         <p:nvSpPr>
-          <p:cNvPr id="3" name="Oval 2"/>
+          <p:cNvPr id="3" name="deckgen:decor"/>
           <p:cNvSpPr/>
           <p:nvPr/>
         </p:nvSpPr>
@@ -11713,7 +11713,7 @@
       </p:sp>
       <p:sp>
         <p:nvSpPr>
-          <p:cNvPr id="4" name="Oval 3"/>
+          <p:cNvPr id="4" name="deckgen:decor"/>
           <p:cNvSpPr/>
           <p:nvPr/>
         </p:nvSpPr>
@@ -11919,7 +11919,7 @@
       </p:sp>
       <p:sp>
         <p:nvSpPr>
-          <p:cNvPr id="10" name="TextBox 9"/>
+          <p:cNvPr id="10" name="deckgen:ornament"/>
           <p:cNvSpPr txBox="1"/>
           <p:nvPr/>
         </p:nvSpPr>
@@ -12104,7 +12104,7 @@
       </p:sp>
       <p:sp>
         <p:nvSpPr>
-          <p:cNvPr id="14" name="TextBox 13"/>
+          <p:cNvPr id="14" name="deckgen:ornament"/>
           <p:cNvSpPr txBox="1"/>
           <p:nvPr/>
         </p:nvSpPr>
@@ -12289,7 +12289,7 @@
       </p:sp>
       <p:sp>
         <p:nvSpPr>
-          <p:cNvPr id="18" name="TextBox 17"/>
+          <p:cNvPr id="18" name="deckgen:ornament"/>
           <p:cNvSpPr txBox="1"/>
           <p:nvPr/>
         </p:nvSpPr>
@@ -12474,7 +12474,7 @@
       </p:sp>
       <p:sp>
         <p:nvSpPr>
-          <p:cNvPr id="22" name="TextBox 21"/>
+          <p:cNvPr id="22" name="deckgen:ornament"/>
           <p:cNvSpPr txBox="1"/>
           <p:nvPr/>
         </p:nvSpPr>
@@ -12796,7 +12796,7 @@
       <p:grpSpPr/>
       <p:sp>
         <p:nvSpPr>
-          <p:cNvPr id="2" name="Oval 1"/>
+          <p:cNvPr id="2" name="deckgen:decor"/>
           <p:cNvSpPr/>
           <p:nvPr/>
         </p:nvSpPr>
@@ -12826,7 +12826,7 @@
       </p:sp>
       <p:sp>
         <p:nvSpPr>
-          <p:cNvPr id="3" name="Oval 2"/>
+          <p:cNvPr id="3" name="deckgen:decor"/>
           <p:cNvSpPr/>
           <p:nvPr/>
         </p:nvSpPr>

--- a/data-eng/decks/w6d4s3.pptx
+++ b/data-eng/decks/w6d4s3.pptx
@@ -13049,7 +13049,7 @@
         </p:nvSpPr>
         <p:spPr>
           <a:xfrm>
-            <a:off x="1428750" y="5486400"/>
+            <a:off x="1428750" y="5476875"/>
             <a:ext cx="419100" cy="381000"/>
           </a:xfrm>
           <a:prstGeom prst="rect">
@@ -13090,7 +13090,7 @@
         </p:nvSpPr>
         <p:spPr>
           <a:xfrm>
-            <a:off x="1905000" y="5486400"/>
+            <a:off x="1905000" y="5476875"/>
             <a:ext cx="6724650" cy="381000"/>
           </a:xfrm>
           <a:prstGeom prst="rect">
@@ -13165,7 +13165,7 @@
         </p:nvSpPr>
         <p:spPr>
           <a:xfrm>
-            <a:off x="9658350" y="5486400"/>
+            <a:off x="9658350" y="5476875"/>
             <a:ext cx="419100" cy="381000"/>
           </a:xfrm>
           <a:prstGeom prst="rect">
@@ -13206,7 +13206,7 @@
         </p:nvSpPr>
         <p:spPr>
           <a:xfrm>
-            <a:off x="10134600" y="5486400"/>
+            <a:off x="10134600" y="5476875"/>
             <a:ext cx="6724650" cy="381000"/>
           </a:xfrm>
           <a:prstGeom prst="rect">
@@ -13281,7 +13281,7 @@
         </p:nvSpPr>
         <p:spPr>
           <a:xfrm>
-            <a:off x="1428750" y="6515100"/>
+            <a:off x="1428750" y="6505575"/>
             <a:ext cx="419100" cy="381000"/>
           </a:xfrm>
           <a:prstGeom prst="rect">
@@ -13322,7 +13322,7 @@
         </p:nvSpPr>
         <p:spPr>
           <a:xfrm>
-            <a:off x="1905000" y="6515100"/>
+            <a:off x="1905000" y="6505575"/>
             <a:ext cx="6724650" cy="381000"/>
           </a:xfrm>
           <a:prstGeom prst="rect">
@@ -13397,7 +13397,7 @@
         </p:nvSpPr>
         <p:spPr>
           <a:xfrm>
-            <a:off x="9658350" y="6515100"/>
+            <a:off x="9658350" y="6505575"/>
             <a:ext cx="419100" cy="381000"/>
           </a:xfrm>
           <a:prstGeom prst="rect">
@@ -13438,7 +13438,7 @@
         </p:nvSpPr>
         <p:spPr>
           <a:xfrm>
-            <a:off x="10134600" y="6515100"/>
+            <a:off x="10134600" y="6505575"/>
             <a:ext cx="6724650" cy="381000"/>
           </a:xfrm>
           <a:prstGeom prst="rect">
